--- a/Präsentation.pptx
+++ b/Präsentation.pptx
@@ -803,7 +803,7 @@
                 <a:uFillTx/>
                 <a:latin typeface="Aptos"/>
               </a:rPr>
-              <a:t> </a:t>
+              <a:t>&lt;Datum/Uhrzeit&gt;</a:t>
             </a:r>
             <a:endParaRPr lang="de-AT" sz="1200" b="0" u="none" strike="noStrike">
               <a:solidFill>
@@ -881,7 +881,7 @@
                 <a:uFillTx/>
                 <a:latin typeface="Times New Roman"/>
               </a:rPr>
-              <a:t> </a:t>
+              <a:t>&lt;Fußzeile&gt;</a:t>
             </a:r>
             <a:endParaRPr lang="de-AT" sz="1400" b="0" u="none" strike="noStrike">
               <a:solidFill>
@@ -952,7 +952,7 @@
                 <a:tab pos="0" algn="l"/>
               </a:tabLst>
             </a:pPr>
-            <a:fld id="{F347262C-36FE-4619-AB8E-9CBDC43D5F51}" type="slidenum">
+            <a:fld id="{36AE198D-9684-4B0C-9BE3-FDEC6A9FC8B2}" type="slidenum">
               <a:rPr lang="de-AT" sz="1200" b="0" u="none" strike="noStrike">
                 <a:solidFill>
                   <a:schemeClr val="dk1">
@@ -963,7 +963,7 @@
                 <a:uFillTx/>
                 <a:latin typeface="Aptos"/>
               </a:rPr>
-              <a:t>8</a:t>
+              <a:t>&lt;Foliennummer&gt;</a:t>
             </a:fld>
             <a:endParaRPr lang="de-AT" sz="1200" b="0" u="none" strike="noStrike">
               <a:solidFill>
@@ -1607,7 +1607,7 @@
                 <a:tab pos="0" algn="l"/>
               </a:tabLst>
             </a:pPr>
-            <a:fld id="{F9F3A271-1008-4C3C-8608-E8E138B86BCC}" type="slidenum">
+            <a:fld id="{D9D47C5A-FFFD-4BF1-ABD3-C1923A8E85CB}" type="slidenum">
               <a:rPr lang="de-AT" sz="1200" b="0" u="none" strike="noStrike">
                 <a:solidFill>
                   <a:schemeClr val="dk1">
@@ -2046,7 +2046,7 @@
                 <a:tab pos="0" algn="l"/>
               </a:tabLst>
             </a:pPr>
-            <a:fld id="{BBD18051-B44A-40BD-B77D-3AE23986BB31}" type="slidenum">
+            <a:fld id="{21D95BFC-B520-40B4-AE8C-FA24246BAFC5}" type="slidenum">
               <a:rPr lang="de-AT" sz="1200" b="0" u="none" strike="noStrike">
                 <a:solidFill>
                   <a:schemeClr val="dk1">
@@ -3086,7 +3086,7 @@
                 <a:uFillTx/>
                 <a:latin typeface="Aptos"/>
               </a:rPr>
-              <a:t> </a:t>
+              <a:t>&lt;Datum/Uhrzeit&gt;</a:t>
             </a:r>
             <a:endParaRPr lang="de-AT" sz="1200" b="0" u="none" strike="noStrike">
               <a:solidFill>
@@ -3164,7 +3164,7 @@
                 <a:uFillTx/>
                 <a:latin typeface="Times New Roman"/>
               </a:rPr>
-              <a:t> </a:t>
+              <a:t>&lt;Fußzeile&gt;</a:t>
             </a:r>
             <a:endParaRPr lang="de-AT" sz="1400" b="0" u="none" strike="noStrike">
               <a:solidFill>
@@ -3235,7 +3235,7 @@
                 <a:tab pos="0" algn="l"/>
               </a:tabLst>
             </a:pPr>
-            <a:fld id="{4872ED27-44BB-4CAD-87CE-9B31F65FA2BB}" type="slidenum">
+            <a:fld id="{0CCFF48A-5CB0-4775-9A2D-5F40987BCA17}" type="slidenum">
               <a:rPr lang="de-AT" sz="1200" b="0" u="none" strike="noStrike">
                 <a:solidFill>
                   <a:schemeClr val="dk1">
@@ -3246,7 +3246,7 @@
                 <a:uFillTx/>
                 <a:latin typeface="Aptos"/>
               </a:rPr>
-              <a:t>8</a:t>
+              <a:t>&lt;Foliennummer&gt;</a:t>
             </a:fld>
             <a:endParaRPr lang="de-AT" sz="1200" b="0" u="none" strike="noStrike">
               <a:solidFill>
@@ -3435,7 +3435,7 @@
                 <a:uFillTx/>
                 <a:latin typeface="Aptos"/>
               </a:rPr>
-              <a:t> </a:t>
+              <a:t>&lt;Datum/Uhrzeit&gt;</a:t>
             </a:r>
             <a:endParaRPr lang="de-AT" sz="1200" b="0" u="none" strike="noStrike">
               <a:solidFill>
@@ -3513,7 +3513,7 @@
                 <a:uFillTx/>
                 <a:latin typeface="Times New Roman"/>
               </a:rPr>
-              <a:t> </a:t>
+              <a:t>&lt;Fußzeile&gt;</a:t>
             </a:r>
             <a:endParaRPr lang="de-AT" sz="1400" b="0" u="none" strike="noStrike">
               <a:solidFill>
@@ -3584,7 +3584,7 @@
                 <a:tab pos="0" algn="l"/>
               </a:tabLst>
             </a:pPr>
-            <a:fld id="{4DE7D78F-CEEB-40F1-9B09-3A4539843700}" type="slidenum">
+            <a:fld id="{38328739-FF56-475B-84AA-316DEF062A90}" type="slidenum">
               <a:rPr lang="de-AT" sz="1200" b="0" u="none" strike="noStrike">
                 <a:solidFill>
                   <a:schemeClr val="dk1">
@@ -3595,7 +3595,7 @@
                 <a:uFillTx/>
                 <a:latin typeface="Aptos"/>
               </a:rPr>
-              <a:t>8</a:t>
+              <a:t>&lt;Foliennummer&gt;</a:t>
             </a:fld>
             <a:endParaRPr lang="de-AT" sz="1200" b="0" u="none" strike="noStrike">
               <a:solidFill>
@@ -3706,7 +3706,7 @@
                 <a:uFillTx/>
                 <a:latin typeface="Aptos"/>
               </a:rPr>
-              <a:t> </a:t>
+              <a:t>&lt;Datum/Uhrzeit&gt;</a:t>
             </a:r>
             <a:endParaRPr lang="de-AT" sz="1200" b="0" u="none" strike="noStrike">
               <a:solidFill>
@@ -3784,7 +3784,7 @@
                 <a:uFillTx/>
                 <a:latin typeface="Times New Roman"/>
               </a:rPr>
-              <a:t> </a:t>
+              <a:t>&lt;Fußzeile&gt;</a:t>
             </a:r>
             <a:endParaRPr lang="de-AT" sz="1400" b="0" u="none" strike="noStrike">
               <a:solidFill>
@@ -3855,7 +3855,7 @@
                 <a:tab pos="0" algn="l"/>
               </a:tabLst>
             </a:pPr>
-            <a:fld id="{8B418E84-6338-4FC7-981F-928C1F78D129}" type="slidenum">
+            <a:fld id="{7945D3FA-AB3F-4857-A722-9E7E79670CA0}" type="slidenum">
               <a:rPr lang="de-AT" sz="1200" b="0" u="none" strike="noStrike">
                 <a:solidFill>
                   <a:schemeClr val="dk1">
@@ -3866,7 +3866,7 @@
                 <a:uFillTx/>
                 <a:latin typeface="Aptos"/>
               </a:rPr>
-              <a:t>8</a:t>
+              <a:t>&lt;Foliennummer&gt;</a:t>
             </a:fld>
             <a:endParaRPr lang="de-AT" sz="1200" b="0" u="none" strike="noStrike">
               <a:solidFill>
@@ -4445,7 +4445,7 @@
                 <a:uFillTx/>
                 <a:latin typeface="Aptos"/>
               </a:rPr>
-              <a:t> </a:t>
+              <a:t>&lt;Datum/Uhrzeit&gt;</a:t>
             </a:r>
             <a:endParaRPr lang="de-AT" sz="1200" b="0" u="none" strike="noStrike">
               <a:solidFill>
@@ -4523,7 +4523,7 @@
                 <a:uFillTx/>
                 <a:latin typeface="Times New Roman"/>
               </a:rPr>
-              <a:t> </a:t>
+              <a:t>&lt;Fußzeile&gt;</a:t>
             </a:r>
             <a:endParaRPr lang="de-AT" sz="1400" b="0" u="none" strike="noStrike">
               <a:solidFill>
@@ -4594,7 +4594,7 @@
                 <a:tab pos="0" algn="l"/>
               </a:tabLst>
             </a:pPr>
-            <a:fld id="{B6DBC791-D4F3-40EE-BA1D-BF079F0329A3}" type="slidenum">
+            <a:fld id="{FA8C147D-7AFB-45A5-B51B-F376243CF766}" type="slidenum">
               <a:rPr lang="de-AT" sz="1200" b="0" u="none" strike="noStrike">
                 <a:solidFill>
                   <a:schemeClr val="dk1">
@@ -4605,7 +4605,7 @@
                 <a:uFillTx/>
                 <a:latin typeface="Aptos"/>
               </a:rPr>
-              <a:t>8</a:t>
+              <a:t>&lt;Foliennummer&gt;</a:t>
             </a:fld>
             <a:endParaRPr lang="de-AT" sz="1200" b="0" u="none" strike="noStrike">
               <a:solidFill>
@@ -5348,7 +5348,7 @@
                 <a:uFillTx/>
                 <a:latin typeface="Aptos"/>
               </a:rPr>
-              <a:t> </a:t>
+              <a:t>&lt;Datum/Uhrzeit&gt;</a:t>
             </a:r>
             <a:endParaRPr lang="de-AT" sz="1200" b="0" u="none" strike="noStrike">
               <a:solidFill>
@@ -5426,7 +5426,7 @@
                 <a:uFillTx/>
                 <a:latin typeface="Times New Roman"/>
               </a:rPr>
-              <a:t> </a:t>
+              <a:t>&lt;Fußzeile&gt;</a:t>
             </a:r>
             <a:endParaRPr lang="de-AT" sz="1400" b="0" u="none" strike="noStrike">
               <a:solidFill>
@@ -5497,7 +5497,7 @@
                 <a:tab pos="0" algn="l"/>
               </a:tabLst>
             </a:pPr>
-            <a:fld id="{496D7F4D-7065-4636-B90E-197998766D10}" type="slidenum">
+            <a:fld id="{DC0045CE-BE5C-4A36-906C-416FFB2F717F}" type="slidenum">
               <a:rPr lang="de-AT" sz="1200" b="0" u="none" strike="noStrike">
                 <a:solidFill>
                   <a:schemeClr val="dk1">
@@ -5508,7 +5508,7 @@
                 <a:uFillTx/>
                 <a:latin typeface="Aptos"/>
               </a:rPr>
-              <a:t>8</a:t>
+              <a:t>&lt;Foliennummer&gt;</a:t>
             </a:fld>
             <a:endParaRPr lang="de-AT" sz="1200" b="0" u="none" strike="noStrike">
               <a:solidFill>
@@ -5697,7 +5697,7 @@
                 <a:uFillTx/>
                 <a:latin typeface="Aptos"/>
               </a:rPr>
-              <a:t> </a:t>
+              <a:t>&lt;Datum/Uhrzeit&gt;</a:t>
             </a:r>
             <a:endParaRPr lang="de-AT" sz="1200" b="0" u="none" strike="noStrike">
               <a:solidFill>
@@ -5775,7 +5775,7 @@
                 <a:uFillTx/>
                 <a:latin typeface="Times New Roman"/>
               </a:rPr>
-              <a:t> </a:t>
+              <a:t>&lt;Fußzeile&gt;</a:t>
             </a:r>
             <a:endParaRPr lang="de-AT" sz="1400" b="0" u="none" strike="noStrike">
               <a:solidFill>
@@ -5846,7 +5846,7 @@
                 <a:tab pos="0" algn="l"/>
               </a:tabLst>
             </a:pPr>
-            <a:fld id="{6458FDB7-A2D6-491C-8A70-CC8D3FDE108D}" type="slidenum">
+            <a:fld id="{6F305315-5B4C-47F7-959C-976D6971AABC}" type="slidenum">
               <a:rPr lang="de-AT" sz="1200" b="0" u="none" strike="noStrike">
                 <a:solidFill>
                   <a:schemeClr val="dk1">
@@ -5857,7 +5857,7 @@
                 <a:uFillTx/>
                 <a:latin typeface="Aptos"/>
               </a:rPr>
-              <a:t>8</a:t>
+              <a:t>&lt;Foliennummer&gt;</a:t>
             </a:fld>
             <a:endParaRPr lang="de-AT" sz="1200" b="0" u="none" strike="noStrike">
               <a:solidFill>
@@ -6929,7 +6929,7 @@
                 <a:tab pos="0" algn="l"/>
               </a:tabLst>
             </a:pPr>
-            <a:fld id="{2FC60531-82F7-4C79-8EB8-7E4F53140BE4}" type="slidenum">
+            <a:fld id="{7163748C-87DF-4D26-A7D8-697E110E3C52}" type="slidenum">
               <a:rPr lang="de-AT" sz="1200" b="0" u="none" strike="noStrike">
                 <a:solidFill>
                   <a:schemeClr val="dk1">
@@ -7584,7 +7584,7 @@
                 <a:tab pos="0" algn="l"/>
               </a:tabLst>
             </a:pPr>
-            <a:fld id="{19B50E9A-9BDA-4029-AE3F-BB470B59E237}" type="slidenum">
+            <a:fld id="{4462490B-FE46-4AD3-867C-0905EE2B65F7}" type="slidenum">
               <a:rPr lang="de-AT" sz="1200" b="0" u="none" strike="noStrike">
                 <a:solidFill>
                   <a:schemeClr val="dk1">
@@ -9982,57 +9982,9 @@
           </a:p>
         </p:txBody>
       </p:sp>
-      <p:sp>
-        <p:nvSpPr>
-          <p:cNvPr id="91" name="PlaceHolder 2"/>
-          <p:cNvSpPr>
-            <a:spLocks noGrp="1"/>
-          </p:cNvSpPr>
-          <p:nvPr>
-            <p:ph/>
-          </p:nvPr>
-        </p:nvSpPr>
-        <p:spPr>
-          <a:xfrm>
-            <a:off x="838080" y="1825560"/>
-            <a:ext cx="10514520" cy="4350240"/>
-          </a:xfrm>
-          <a:prstGeom prst="rect">
-            <a:avLst/>
-          </a:prstGeom>
-          <a:noFill/>
-          <a:ln w="0">
-            <a:noFill/>
-          </a:ln>
-        </p:spPr>
-        <p:txBody>
-          <a:bodyPr lIns="91440" tIns="45720" rIns="91440" bIns="45720" anchor="t">
-            <a:noAutofit/>
-          </a:bodyPr>
-          <a:p>
-            <a:pPr indent="0" algn="l" defTabSz="914400">
-              <a:lnSpc>
-                <a:spcPct val="90000"/>
-              </a:lnSpc>
-              <a:spcBef>
-                <a:spcPts val="1001"/>
-              </a:spcBef>
-              <a:buNone/>
-            </a:pPr>
-            <a:endParaRPr lang="de-DE" sz="2800" b="0" u="none" strike="noStrike">
-              <a:solidFill>
-                <a:schemeClr val="dk1"/>
-              </a:solidFill>
-              <a:effectLst/>
-              <a:uFillTx/>
-              <a:latin typeface="Aptos"/>
-            </a:endParaRPr>
-          </a:p>
-        </p:txBody>
-      </p:sp>
       <p:pic>
         <p:nvPicPr>
-          <p:cNvPr id="92" name=""/>
+          <p:cNvPr id="91" name=""/>
           <p:cNvPicPr/>
           <p:nvPr/>
         </p:nvPicPr>
@@ -10042,32 +9994,8 @@
         </p:blipFill>
         <p:spPr>
           <a:xfrm>
-            <a:off x="5793120" y="2520000"/>
-            <a:ext cx="6086520" cy="3294000"/>
-          </a:xfrm>
-          <a:prstGeom prst="rect">
-            <a:avLst/>
-          </a:prstGeom>
-          <a:noFill/>
-          <a:ln w="0">
-            <a:noFill/>
-          </a:ln>
-        </p:spPr>
-      </p:pic>
-      <p:pic>
-        <p:nvPicPr>
-          <p:cNvPr id="93" name=""/>
-          <p:cNvPicPr/>
-          <p:nvPr/>
-        </p:nvPicPr>
-        <p:blipFill>
-          <a:blip r:embed="rId2"/>
-          <a:stretch/>
-        </p:blipFill>
-        <p:spPr>
-          <a:xfrm>
-            <a:off x="471960" y="2520000"/>
-            <a:ext cx="5107680" cy="3262680"/>
+            <a:off x="1620000" y="2053800"/>
+            <a:ext cx="9052920" cy="3886200"/>
           </a:xfrm>
           <a:prstGeom prst="rect">
             <a:avLst/>
@@ -10110,7 +10038,7 @@
       </p:grpSpPr>
       <p:sp>
         <p:nvSpPr>
-          <p:cNvPr id="94" name="PlaceHolder 1"/>
+          <p:cNvPr id="92" name="PlaceHolder 1"/>
           <p:cNvSpPr>
             <a:spLocks noGrp="1"/>
           </p:cNvSpPr>
@@ -10169,7 +10097,7 @@
       </p:sp>
       <p:pic>
         <p:nvPicPr>
-          <p:cNvPr id="95" name="Inhaltsplatzhalter 4"/>
+          <p:cNvPr id="93" name="Inhaltsplatzhalter 4"/>
           <p:cNvPicPr/>
           <p:nvPr/>
         </p:nvPicPr>
@@ -10193,7 +10121,7 @@
       </p:pic>
       <p:pic>
         <p:nvPicPr>
-          <p:cNvPr id="96" name="Grafik 8"/>
+          <p:cNvPr id="94" name="Grafik 8"/>
           <p:cNvPicPr/>
           <p:nvPr/>
         </p:nvPicPr>
@@ -10217,7 +10145,7 @@
       </p:pic>
       <p:pic>
         <p:nvPicPr>
-          <p:cNvPr id="97" name=""/>
+          <p:cNvPr id="95" name=""/>
           <p:cNvPicPr/>
           <p:nvPr/>
         </p:nvPicPr>
@@ -10253,7 +10181,7 @@
 </file>
 
 <file path=ppt/slides/slide8.xml><?xml version="1.0" encoding="utf-8"?>
-<p:sld xmlns:a="http://schemas.openxmlformats.org/drawingml/2006/main" xmlns:p="http://schemas.openxmlformats.org/presentationml/2006/main" xmlns:r="http://schemas.openxmlformats.org/officeDocument/2006/relationships" xmlns:p14="http://schemas.microsoft.com/office/powerpoint/2010/main" xmlns:p15="http://schemas.microsoft.com/office/powerpoint/2012/main" xmlns:mc="http://schemas.openxmlformats.org/markup-compatibility/2006">
+<p:sld xmlns:a="http://schemas.openxmlformats.org/drawingml/2006/main" xmlns:p="http://schemas.openxmlformats.org/presentationml/2006/main" xmlns:r="http://schemas.openxmlformats.org/officeDocument/2006/relationships" xmlns:p14="http://schemas.microsoft.com/office/powerpoint/2010/main" xmlns:p15="http://schemas.microsoft.com/office/powerpoint/2012/main" xmlns:mc="http://schemas.openxmlformats.org/markup-compatibility/2006" show="0">
   <p:cSld>
     <p:spTree>
       <p:nvGrpSpPr>
@@ -10271,7 +10199,7 @@
       </p:grpSpPr>
       <p:sp>
         <p:nvSpPr>
-          <p:cNvPr id="98" name=""/>
+          <p:cNvPr id="96" name=""/>
           <p:cNvSpPr txBox="1"/>
           <p:nvPr/>
         </p:nvSpPr>
@@ -10474,7 +10402,7 @@
       </p:sp>
       <p:pic>
         <p:nvPicPr>
-          <p:cNvPr id="99" name=""/>
+          <p:cNvPr id="97" name=""/>
           <p:cNvPicPr/>
           <p:nvPr/>
         </p:nvPicPr>
@@ -10528,7 +10456,7 @@
       </p:grpSpPr>
       <p:sp>
         <p:nvSpPr>
-          <p:cNvPr id="100" name="PlaceHolder 1"/>
+          <p:cNvPr id="98" name="PlaceHolder 1"/>
           <p:cNvSpPr>
             <a:spLocks noGrp="1"/>
           </p:cNvSpPr>
@@ -10587,7 +10515,7 @@
       </p:sp>
       <p:sp>
         <p:nvSpPr>
-          <p:cNvPr id="101" name="PlaceHolder 2"/>
+          <p:cNvPr id="99" name="PlaceHolder 2"/>
           <p:cNvSpPr>
             <a:spLocks noGrp="1"/>
           </p:cNvSpPr>
